--- a/presentation/Module-6_Reviewing-Validating-and-Maintaining-Agent-Output.pptx
+++ b/presentation/Module-6_Reviewing-Validating-and-Maintaining-Agent-Output.pptx
@@ -16,10 +16,9 @@
     <p:sldId id="264" r:id="rId10"/>
     <p:sldId id="265" r:id="rId11"/>
     <p:sldId id="266" r:id="rId12"/>
-    <p:sldId id="267" r:id="rId13"/>
   </p:sldIdLst>
   <p:notesMasterIdLst>
-    <p:notesMasterId r:id="rId14"/>
+    <p:notesMasterId r:id="rId13"/>
   </p:notesMasterIdLst>
   <p:sldSz cx="12192000" cy="6858000"/>
   <p:notesSz cx="6858000" cy="12192000"/>
@@ -713,94 +712,6 @@
             <a:fld id="{F7021451-1387-4CA6-816F-3879F97B5CBC}" type="slidenum">
               <a:rPr lang="en-US"/>
               <a:t>11</a:t>
-            </a:fld>
-            <a:endParaRPr lang="en-US"/>
-          </a:p>
-        </p:txBody>
-      </p:sp>
-    </p:spTree>
-    <p:extLst>
-      <p:ext uri="{BB962C8B-B14F-4D97-AF65-F5344CB8AC3E}">
-        <p14:creationId xmlns:p14="http://schemas.microsoft.com/office/powerpoint/2010/main" val="1024086991"/>
-      </p:ext>
-    </p:extLst>
-  </p:cSld>
-  <p:clrMapOvr>
-    <a:masterClrMapping/>
-  </p:clrMapOvr>
-</p:notes>
-</file>
-
-<file path=ppt/notesSlides/notesSlide12.xml><?xml version="1.0" encoding="utf-8"?>
-<p:notes xmlns:a="http://schemas.openxmlformats.org/drawingml/2006/main" xmlns:r="http://schemas.openxmlformats.org/officeDocument/2006/relationships" xmlns:p="http://schemas.openxmlformats.org/presentationml/2006/main">
-  <p:cSld>
-    <p:spTree>
-      <p:nvGrpSpPr>
-        <p:cNvPr id="1" name=""/>
-        <p:cNvGrpSpPr/>
-        <p:nvPr/>
-      </p:nvGrpSpPr>
-      <p:grpSpPr>
-        <a:xfrm>
-          <a:off x="0" y="0"/>
-          <a:ext cx="0" cy="0"/>
-          <a:chOff x="0" y="0"/>
-          <a:chExt cx="0" cy="0"/>
-        </a:xfrm>
-      </p:grpSpPr>
-      <p:sp>
-        <p:nvSpPr>
-          <p:cNvPr id="2" name="Slide Image Placeholder 1"/>
-          <p:cNvSpPr>
-            <a:spLocks noGrp="1" noRot="1" noChangeAspect="1"/>
-          </p:cNvSpPr>
-          <p:nvPr>
-            <p:ph type="sldImg"/>
-          </p:nvPr>
-        </p:nvSpPr>
-        <p:spPr/>
-      </p:sp>
-      <p:sp>
-        <p:nvSpPr>
-          <p:cNvPr id="3" name="Notes Placeholder 2"/>
-          <p:cNvSpPr>
-            <a:spLocks noGrp="1"/>
-          </p:cNvSpPr>
-          <p:nvPr>
-            <p:ph type="body" idx="1"/>
-          </p:nvPr>
-        </p:nvSpPr>
-        <p:spPr/>
-        <p:txBody>
-          <a:bodyPr/>
-          <a:lstStyle/>
-          <a:p>
-            <a:r>
-              <a:rPr lang="en-US" dirty="0"/>
-              <a:t/>
-            </a:r>
-            <a:endParaRPr lang="en-US" dirty="0"/>
-          </a:p>
-        </p:txBody>
-      </p:sp>
-      <p:sp>
-        <p:nvSpPr>
-          <p:cNvPr id="4" name="Slide Number Placeholder 3"/>
-          <p:cNvSpPr>
-            <a:spLocks noGrp="1"/>
-          </p:cNvSpPr>
-          <p:nvPr>
-            <p:ph type="sldNum" sz="quarter" idx="10"/>
-          </p:nvPr>
-        </p:nvSpPr>
-        <p:spPr/>
-        <p:txBody>
-          <a:bodyPr/>
-          <a:lstStyle/>
-          <a:p>
-            <a:fld id="{F7021451-1387-4CA6-816F-3879F97B5CBC}" type="slidenum">
-              <a:rPr lang="en-US"/>
-              <a:t>12</a:t>
             </a:fld>
             <a:endParaRPr lang="en-US"/>
           </a:p>
@@ -2454,7 +2365,7 @@
                           <a:ea typeface="Calibri" pitchFamily="34" charset="-122"/>
                           <a:cs typeface="Calibri" pitchFamily="34" charset="-120"/>
                         </a:rPr>
-                        <a:t>/speckit.converge (append-only, iterative)</a:t>
+                        <a:t>Re-run /speckit.analyze; update constitution/spec</a:t>
                       </a:r>
                       <a:endParaRPr lang="en-US" sz="1300" dirty="0">
                         <a:latin typeface="Calibri" charset="0"/>
@@ -2654,7 +2565,7 @@
                           <a:ea typeface="Calibri" pitchFamily="34" charset="-122"/>
                           <a:cs typeface="Calibri" pitchFamily="34" charset="-120"/>
                         </a:rPr>
-                        <a:t>Re-run /speckit.analyze</a:t>
+                        <a:t>Update constitution, spec, or clarify answers</a:t>
                       </a:r>
                       <a:endParaRPr lang="en-US" sz="1300" dirty="0">
                         <a:latin typeface="Calibri" charset="0"/>
@@ -3233,7 +3144,7 @@
                 <a:ea typeface="Calibri" pitchFamily="34" charset="-122"/>
                 <a:cs typeface="Calibri" pitchFamily="34" charset="-120"/>
               </a:rPr>
-              <a:t>Converge and verify exist for the same reason: implementation drifts from intent, and someone has to check.</a:t>
+              <a:t>Both frameworks exist to answer the same question after code lands: does it still match what was decided?</a:t>
             </a:r>
             <a:endParaRPr lang="en-US" sz="1700" dirty="0"/>
           </a:p>
@@ -3365,260 +3276,6 @@
               <a:rPr lang="en-US" sz="1000" dirty="0">
                 <a:solidFill>
                   <a:srgbClr val="8CA3C7"/>
-                </a:solidFill>
-                <a:latin typeface="Calibri" pitchFamily="34" charset="0"/>
-                <a:ea typeface="Calibri" pitchFamily="34" charset="-122"/>
-                <a:cs typeface="Calibri" pitchFamily="34" charset="-120"/>
-              </a:rPr>
-              <a:t>Spec-Driven Development with Agentic AI</a:t>
-            </a:r>
-            <a:endParaRPr lang="en-US" sz="1000" dirty="0"/>
-          </a:p>
-        </p:txBody>
-      </p:sp>
-    </p:spTree>
-  </p:cSld>
-  <p:clrMapOvr>
-    <a:masterClrMapping/>
-  </p:clrMapOvr>
-</p:sld>
-</file>
-
-<file path=ppt/slides/slide12.xml><?xml version="1.0" encoding="utf-8"?>
-<p:sld xmlns:a="http://schemas.openxmlformats.org/drawingml/2006/main" xmlns:r="http://schemas.openxmlformats.org/officeDocument/2006/relationships" xmlns:p="http://schemas.openxmlformats.org/presentationml/2006/main">
-  <p:cSld name="Slide 12">
-    <p:bg>
-      <p:bgPr>
-        <a:solidFill>
-          <a:srgbClr val="FFFFFF"/>
-        </a:solidFill>
-      </p:bgPr>
-    </p:bg>
-    <p:spTree>
-      <p:nvGrpSpPr>
-        <p:cNvPr id="1" name=""/>
-        <p:cNvGrpSpPr/>
-        <p:nvPr/>
-      </p:nvGrpSpPr>
-      <p:grpSpPr>
-        <a:xfrm>
-          <a:off x="0" y="0"/>
-          <a:ext cx="0" cy="0"/>
-          <a:chOff x="0" y="0"/>
-          <a:chExt cx="0" cy="0"/>
-        </a:xfrm>
-      </p:grpSpPr>
-      <p:sp>
-        <p:nvSpPr>
-          <p:cNvPr id="2" name="Shape 0"/>
-          <p:cNvSpPr/>
-          <p:nvPr/>
-        </p:nvSpPr>
-        <p:spPr>
-          <a:xfrm>
-            <a:off x="548640" y="1828800"/>
-            <a:ext cx="11094415" cy="2377440"/>
-          </a:xfrm>
-          <a:prstGeom prst="roundRect">
-            <a:avLst>
-              <a:gd name="adj" fmla="val 4615"/>
-            </a:avLst>
-          </a:prstGeom>
-          <a:solidFill>
-            <a:srgbClr val="F2F5F9"/>
-          </a:solidFill>
-          <a:ln w="15875">
-            <a:solidFill>
-              <a:srgbClr val="C0504D"/>
-            </a:solidFill>
-            <a:prstDash val="solid"/>
-          </a:ln>
-        </p:spPr>
-      </p:sp>
-      <p:sp>
-        <p:nvSpPr>
-          <p:cNvPr id="3" name="Text 1"/>
-          <p:cNvSpPr/>
-          <p:nvPr/>
-        </p:nvSpPr>
-        <p:spPr>
-          <a:xfrm>
-            <a:off x="1005840" y="2103120"/>
-            <a:ext cx="10180015" cy="365760"/>
-          </a:xfrm>
-          <a:prstGeom prst="rect">
-            <a:avLst/>
-          </a:prstGeom>
-          <a:noFill/>
-          <a:ln/>
-        </p:spPr>
-        <p:txBody>
-          <a:bodyPr wrap="square" rtlCol="0" anchor="ctr"/>
-          <a:lstStyle/>
-          <a:p>
-            <a:pPr indent="0" marL="0">
-              <a:buNone/>
-            </a:pPr>
-            <a:r>
-              <a:rPr lang="en-US" sz="1300" b="1" spc="150" kern="0" dirty="0">
-                <a:solidFill>
-                  <a:srgbClr val="C0504D"/>
-                </a:solidFill>
-                <a:latin typeface="Calibri" pitchFamily="34" charset="0"/>
-                <a:ea typeface="Calibri" pitchFamily="34" charset="-122"/>
-                <a:cs typeface="Calibri" pitchFamily="34" charset="-120"/>
-              </a:rPr>
-              <a:t>HANDS-ON NEXT</a:t>
-            </a:r>
-            <a:endParaRPr lang="en-US" sz="1300" dirty="0"/>
-          </a:p>
-        </p:txBody>
-      </p:sp>
-      <p:sp>
-        <p:nvSpPr>
-          <p:cNvPr id="4" name="Text 2"/>
-          <p:cNvSpPr/>
-          <p:nvPr/>
-        </p:nvSpPr>
-        <p:spPr>
-          <a:xfrm>
-            <a:off x="1005840" y="2514600"/>
-            <a:ext cx="10180015" cy="1463040"/>
-          </a:xfrm>
-          <a:prstGeom prst="rect">
-            <a:avLst/>
-          </a:prstGeom>
-          <a:noFill/>
-          <a:ln/>
-        </p:spPr>
-        <p:txBody>
-          <a:bodyPr wrap="square" rtlCol="0" anchor="t"/>
-          <a:lstStyle/>
-          <a:p>
-            <a:pPr indent="0" marL="0">
-              <a:buNone/>
-            </a:pPr>
-            <a:r>
-              <a:rPr lang="en-US" sz="1700" dirty="0">
-                <a:solidFill>
-                  <a:srgbClr val="1B2A4A"/>
-                </a:solidFill>
-                <a:latin typeface="Calibri" pitchFamily="34" charset="0"/>
-                <a:ea typeface="Calibri" pitchFamily="34" charset="-122"/>
-                <a:cs typeface="Calibri" pitchFamily="34" charset="-120"/>
-              </a:rPr>
-              <a:t>Review a set of intentionally flawed agent-generated changes against their source spec to practice spotting planted issues. Then apply the same lens to your own Module-5 implementation, and update your project's spec, constitution, or instruction files to close any gap you find.</a:t>
-            </a:r>
-            <a:endParaRPr lang="en-US" sz="1700" dirty="0"/>
-          </a:p>
-        </p:txBody>
-      </p:sp>
-      <p:sp>
-        <p:nvSpPr>
-          <p:cNvPr id="5" name="Text 3"/>
-          <p:cNvSpPr/>
-          <p:nvPr/>
-        </p:nvSpPr>
-        <p:spPr>
-          <a:xfrm>
-            <a:off x="548640" y="4480560"/>
-            <a:ext cx="11094415" cy="457200"/>
-          </a:xfrm>
-          <a:prstGeom prst="rect">
-            <a:avLst/>
-          </a:prstGeom>
-          <a:noFill/>
-          <a:ln/>
-        </p:spPr>
-        <p:txBody>
-          <a:bodyPr wrap="square" rtlCol="0" anchor="ctr"/>
-          <a:lstStyle/>
-          <a:p>
-            <a:pPr algn="ctr" indent="0" marL="0">
-              <a:buNone/>
-            </a:pPr>
-            <a:r>
-              <a:rPr lang="en-US" sz="1300" i="1" dirty="0">
-                <a:solidFill>
-                  <a:srgbClr val="5A6B85"/>
-                </a:solidFill>
-                <a:latin typeface="Calibri" pitchFamily="34" charset="0"/>
-                <a:ea typeface="Calibri" pitchFamily="34" charset="-122"/>
-                <a:cs typeface="Calibri" pitchFamily="34" charset="-120"/>
-              </a:rPr>
-              <a:t>Next: Module 7: Multi-Agent Workflows and Team Adoption</a:t>
-            </a:r>
-            <a:endParaRPr lang="en-US" sz="1300" dirty="0"/>
-          </a:p>
-        </p:txBody>
-      </p:sp>
-      <p:sp>
-        <p:nvSpPr>
-          <p:cNvPr id="6" name="Text 4"/>
-          <p:cNvSpPr/>
-          <p:nvPr/>
-        </p:nvSpPr>
-        <p:spPr>
-          <a:xfrm>
-            <a:off x="548640" y="6473952"/>
-            <a:ext cx="5486400" cy="274320"/>
-          </a:xfrm>
-          <a:prstGeom prst="rect">
-            <a:avLst/>
-          </a:prstGeom>
-          <a:noFill/>
-          <a:ln/>
-        </p:spPr>
-        <p:txBody>
-          <a:bodyPr wrap="square" rtlCol="0" anchor="ctr"/>
-          <a:lstStyle/>
-          <a:p>
-            <a:pPr algn="l" indent="0" marL="0">
-              <a:buNone/>
-            </a:pPr>
-            <a:r>
-              <a:rPr lang="en-US" sz="1000" dirty="0">
-                <a:solidFill>
-                  <a:srgbClr val="5A6B85"/>
-                </a:solidFill>
-                <a:latin typeface="Calibri" pitchFamily="34" charset="0"/>
-                <a:ea typeface="Calibri" pitchFamily="34" charset="-122"/>
-                <a:cs typeface="Calibri" pitchFamily="34" charset="-120"/>
-              </a:rPr>
-              <a:t>Module 6</a:t>
-            </a:r>
-            <a:endParaRPr lang="en-US" sz="1000" dirty="0"/>
-          </a:p>
-        </p:txBody>
-      </p:sp>
-      <p:sp>
-        <p:nvSpPr>
-          <p:cNvPr id="7" name="Text 5"/>
-          <p:cNvSpPr/>
-          <p:nvPr/>
-        </p:nvSpPr>
-        <p:spPr>
-          <a:xfrm>
-            <a:off x="6156655" y="6473952"/>
-            <a:ext cx="5486400" cy="274320"/>
-          </a:xfrm>
-          <a:prstGeom prst="rect">
-            <a:avLst/>
-          </a:prstGeom>
-          <a:noFill/>
-          <a:ln/>
-        </p:spPr>
-        <p:txBody>
-          <a:bodyPr wrap="square" rtlCol="0" anchor="ctr"/>
-          <a:lstStyle/>
-          <a:p>
-            <a:pPr algn="r" indent="0" marL="0">
-              <a:buNone/>
-            </a:pPr>
-            <a:r>
-              <a:rPr lang="en-US" sz="1000" dirty="0">
-                <a:solidFill>
-                  <a:srgbClr val="5A6B85"/>
                 </a:solidFill>
                 <a:latin typeface="Calibri" pitchFamily="34" charset="0"/>
                 <a:ea typeface="Calibri" pitchFamily="34" charset="-122"/>
@@ -5397,7 +5054,7 @@
                 <a:ea typeface="Times New Roman" pitchFamily="34" charset="-122"/>
                 <a:cs typeface="Times New Roman" pitchFamily="34" charset="-120"/>
               </a:rPr>
-              <a:t>Converge: Confirm Nothing Was Missed</a:t>
+              <a:t>Keeping Specs and Constitution Current</a:t>
             </a:r>
             <a:endParaRPr lang="en-US" sz="2500" dirty="0"/>
           </a:p>
@@ -5427,14 +5084,36 @@
       </p:sp>
       <p:sp>
         <p:nvSpPr>
-          <p:cNvPr id="6" name="Text 4"/>
-          <p:cNvSpPr/>
-          <p:nvPr/>
-        </p:nvSpPr>
-        <p:spPr>
-          <a:xfrm>
-            <a:off x="822960" y="1764792"/>
-            <a:ext cx="10545775" cy="1271016"/>
+          <p:cNvPr id="6" name="Shape 4"/>
+          <p:cNvSpPr/>
+          <p:nvPr/>
+        </p:nvSpPr>
+        <p:spPr>
+          <a:xfrm>
+            <a:off x="777240" y="2199132"/>
+            <a:ext cx="2834640" cy="402336"/>
+          </a:xfrm>
+          <a:prstGeom prst="roundRect">
+            <a:avLst>
+              <a:gd name="adj" fmla="val 13636"/>
+            </a:avLst>
+          </a:prstGeom>
+          <a:solidFill>
+            <a:srgbClr val="1B2A4A"/>
+          </a:solidFill>
+          <a:ln/>
+        </p:spPr>
+      </p:sp>
+      <p:sp>
+        <p:nvSpPr>
+          <p:cNvPr id="7" name="Text 5"/>
+          <p:cNvSpPr/>
+          <p:nvPr/>
+        </p:nvSpPr>
+        <p:spPr>
+          <a:xfrm>
+            <a:off x="777240" y="2199132"/>
+            <a:ext cx="2834640" cy="402336"/>
           </a:xfrm>
           <a:prstGeom prst="rect">
             <a:avLst/>
@@ -5446,11 +5125,50 @@
           <a:bodyPr wrap="square" rtlCol="0" anchor="ctr"/>
           <a:lstStyle/>
           <a:p>
+            <a:pPr algn="ctr" indent="0" marL="0">
+              <a:buNone/>
+            </a:pPr>
+            <a:r>
+              <a:rPr lang="en-US" sz="1200" dirty="0">
+                <a:solidFill>
+                  <a:srgbClr val="8FE3C7"/>
+                </a:solidFill>
+                <a:latin typeface="Courier New" pitchFamily="34" charset="0"/>
+                <a:ea typeface="Courier New" pitchFamily="34" charset="-122"/>
+                <a:cs typeface="Courier New" pitchFamily="34" charset="-120"/>
+              </a:rPr>
+              <a:t>/speckit.analyze</a:t>
+            </a:r>
+            <a:endParaRPr lang="en-US" sz="1200" dirty="0"/>
+          </a:p>
+        </p:txBody>
+      </p:sp>
+      <p:sp>
+        <p:nvSpPr>
+          <p:cNvPr id="8" name="Text 6"/>
+          <p:cNvSpPr/>
+          <p:nvPr/>
+        </p:nvSpPr>
+        <p:spPr>
+          <a:xfrm>
+            <a:off x="3840480" y="1764792"/>
+            <a:ext cx="7573975" cy="1271016"/>
+          </a:xfrm>
+          <a:prstGeom prst="rect">
+            <a:avLst/>
+          </a:prstGeom>
+          <a:noFill/>
+          <a:ln/>
+        </p:spPr>
+        <p:txBody>
+          <a:bodyPr wrap="square" rtlCol="0" anchor="ctr"/>
+          <a:lstStyle/>
+          <a:p>
             <a:pPr indent="0" marL="0">
               <a:buNone/>
             </a:pPr>
             <a:r>
-              <a:rPr lang="en-US" sz="1400" b="1" dirty="0">
+              <a:rPr lang="en-US" sz="1350" dirty="0">
                 <a:solidFill>
                   <a:srgbClr val="1B2A4A"/>
                 </a:solidFill>
@@ -5458,29 +5176,15 @@
                 <a:ea typeface="Calibri" pitchFamily="34" charset="-122"/>
                 <a:cs typeface="Calibri" pitchFamily="34" charset="-120"/>
               </a:rPr>
-              <a:t>Re-run analyze: </a:t>
-            </a:r>
-            <a:pPr indent="0" marL="0">
-              <a:buNone/>
-            </a:pPr>
-            <a:r>
-              <a:rPr lang="en-US" sz="1400" dirty="0">
-                <a:solidFill>
-                  <a:srgbClr val="1B2A4A"/>
-                </a:solidFill>
-                <a:latin typeface="Calibri" pitchFamily="34" charset="0"/>
-                <a:ea typeface="Calibri" pitchFamily="34" charset="-122"/>
-                <a:cs typeface="Calibri" pitchFamily="34" charset="-120"/>
-              </a:rPr>
-              <a:t>/speckit.analyze can be re-run after implementation as an extra review pass, not just before.</a:t>
-            </a:r>
-            <a:endParaRPr lang="en-US" sz="1400" dirty="0"/>
-          </a:p>
-        </p:txBody>
-      </p:sp>
-      <p:sp>
-        <p:nvSpPr>
-          <p:cNvPr id="7" name="Shape 5"/>
+              <a:t>Re-run after implementation as an extra review pass, not just before, to catch drift between what was built and what was specified.</a:t>
+            </a:r>
+            <a:endParaRPr lang="en-US" sz="1350" dirty="0"/>
+          </a:p>
+        </p:txBody>
+      </p:sp>
+      <p:sp>
+        <p:nvSpPr>
+          <p:cNvPr id="9" name="Shape 7"/>
           <p:cNvSpPr/>
           <p:nvPr/>
         </p:nvSpPr>
@@ -5502,13 +5206,88 @@
       </p:sp>
       <p:sp>
         <p:nvSpPr>
-          <p:cNvPr id="8" name="Shape 6"/>
-          <p:cNvSpPr/>
-          <p:nvPr/>
-        </p:nvSpPr>
-        <p:spPr>
-          <a:xfrm>
-            <a:off x="777240" y="3726180"/>
+          <p:cNvPr id="10" name="Text 8"/>
+          <p:cNvSpPr/>
+          <p:nvPr/>
+        </p:nvSpPr>
+        <p:spPr>
+          <a:xfrm>
+            <a:off x="822960" y="3291840"/>
+            <a:ext cx="10545775" cy="1271016"/>
+          </a:xfrm>
+          <a:prstGeom prst="rect">
+            <a:avLst/>
+          </a:prstGeom>
+          <a:noFill/>
+          <a:ln/>
+        </p:spPr>
+        <p:txBody>
+          <a:bodyPr wrap="square" rtlCol="0" anchor="ctr"/>
+          <a:lstStyle/>
+          <a:p>
+            <a:pPr indent="0" marL="0">
+              <a:buNone/>
+            </a:pPr>
+            <a:r>
+              <a:rPr lang="en-US" sz="1400" b="1" dirty="0">
+                <a:solidFill>
+                  <a:srgbClr val="1B2A4A"/>
+                </a:solidFill>
+                <a:latin typeface="Calibri" pitchFamily="34" charset="0"/>
+                <a:ea typeface="Calibri" pitchFamily="34" charset="-122"/>
+                <a:cs typeface="Calibri" pitchFamily="34" charset="-120"/>
+              </a:rPr>
+              <a:t>Closing the gap: </a:t>
+            </a:r>
+            <a:pPr indent="0" marL="0">
+              <a:buNone/>
+            </a:pPr>
+            <a:r>
+              <a:rPr lang="en-US" sz="1400" dirty="0">
+                <a:solidFill>
+                  <a:srgbClr val="1B2A4A"/>
+                </a:solidFill>
+                <a:latin typeface="Calibri" pitchFamily="34" charset="0"/>
+                <a:ea typeface="Calibri" pitchFamily="34" charset="-122"/>
+                <a:cs typeface="Calibri" pitchFamily="34" charset="-120"/>
+              </a:rPr>
+              <a:t>When review surfaces a gap, update the constitution or the spec directly (via /speckit.specify or another /speckit.clarify pass) rather than letting the code silently diverge from them.</a:t>
+            </a:r>
+            <a:endParaRPr lang="en-US" sz="1400" dirty="0"/>
+          </a:p>
+        </p:txBody>
+      </p:sp>
+      <p:sp>
+        <p:nvSpPr>
+          <p:cNvPr id="11" name="Shape 9"/>
+          <p:cNvSpPr/>
+          <p:nvPr/>
+        </p:nvSpPr>
+        <p:spPr>
+          <a:xfrm>
+            <a:off x="548640" y="4745736"/>
+            <a:ext cx="11094415" cy="1417320"/>
+          </a:xfrm>
+          <a:prstGeom prst="roundRect">
+            <a:avLst>
+              <a:gd name="adj" fmla="val 5161"/>
+            </a:avLst>
+          </a:prstGeom>
+          <a:solidFill>
+            <a:srgbClr val="F2F5F9"/>
+          </a:solidFill>
+          <a:ln/>
+        </p:spPr>
+      </p:sp>
+      <p:sp>
+        <p:nvSpPr>
+          <p:cNvPr id="12" name="Shape 10"/>
+          <p:cNvSpPr/>
+          <p:nvPr/>
+        </p:nvSpPr>
+        <p:spPr>
+          <a:xfrm>
+            <a:off x="777240" y="5253228"/>
             <a:ext cx="2834640" cy="402336"/>
           </a:xfrm>
           <a:prstGeom prst="roundRect">
@@ -5524,13 +5303,13 @@
       </p:sp>
       <p:sp>
         <p:nvSpPr>
-          <p:cNvPr id="9" name="Text 7"/>
-          <p:cNvSpPr/>
-          <p:nvPr/>
-        </p:nvSpPr>
-        <p:spPr>
-          <a:xfrm>
-            <a:off x="777240" y="3726180"/>
+          <p:cNvPr id="13" name="Text 11"/>
+          <p:cNvSpPr/>
+          <p:nvPr/>
+        </p:nvSpPr>
+        <p:spPr>
+          <a:xfrm>
+            <a:off x="777240" y="5253228"/>
             <a:ext cx="2834640" cy="402336"/>
           </a:xfrm>
           <a:prstGeom prst="rect">
@@ -5563,13 +5342,13 @@
       </p:sp>
       <p:sp>
         <p:nvSpPr>
-          <p:cNvPr id="10" name="Text 8"/>
-          <p:cNvSpPr/>
-          <p:nvPr/>
-        </p:nvSpPr>
-        <p:spPr>
-          <a:xfrm>
-            <a:off x="3840480" y="3291840"/>
+          <p:cNvPr id="14" name="Text 12"/>
+          <p:cNvSpPr/>
+          <p:nvPr/>
+        </p:nvSpPr>
+        <p:spPr>
+          <a:xfrm>
+            <a:off x="3840480" y="4818888"/>
             <a:ext cx="7573975" cy="1271016"/>
           </a:xfrm>
           <a:prstGeom prst="rect">
@@ -5586,7 +5365,7 @@
               <a:buNone/>
             </a:pPr>
             <a:r>
-              <a:rPr lang="en-US" sz="1350" dirty="0">
+              <a:rPr lang="en-US" sz="1200" dirty="0">
                 <a:solidFill>
                   <a:srgbClr val="1B2A4A"/>
                 </a:solidFill>
@@ -5594,44 +5373,44 @@
                 <a:ea typeface="Calibri" pitchFamily="34" charset="-122"/>
                 <a:cs typeface="Calibri" pitchFamily="34" charset="-120"/>
               </a:rPr>
-              <a:t>Assesses the codebase against the feature's spec, plan, and tasks. Append-only: it never edits or deletes code.</a:t>
-            </a:r>
-            <a:endParaRPr lang="en-US" sz="1350" dirty="0"/>
-          </a:p>
-        </p:txBody>
-      </p:sp>
-      <p:sp>
-        <p:nvSpPr>
-          <p:cNvPr id="11" name="Shape 9"/>
-          <p:cNvSpPr/>
-          <p:nvPr/>
-        </p:nvSpPr>
-        <p:spPr>
-          <a:xfrm>
-            <a:off x="548640" y="4745736"/>
-            <a:ext cx="11094415" cy="1417320"/>
+              <a:t>Assesses the codebase against the feature's spec, plan, and tasks and appends any missed work as new tasks. Append-only: it never edits or deletes code directly.</a:t>
+            </a:r>
+            <a:endParaRPr lang="en-US" sz="1200" dirty="0"/>
+          </a:p>
+        </p:txBody>
+      </p:sp>
+      <p:sp>
+        <p:nvSpPr>
+          <p:cNvPr id="15" name="Shape 13"/>
+          <p:cNvSpPr/>
+          <p:nvPr/>
+        </p:nvSpPr>
+        <p:spPr>
+          <a:xfrm>
+            <a:off x="9814255" y="4837176"/>
+            <a:ext cx="1645920" cy="292608"/>
           </a:xfrm>
           <a:prstGeom prst="roundRect">
             <a:avLst>
-              <a:gd name="adj" fmla="val 5161"/>
+              <a:gd name="adj" fmla="val 50000"/>
             </a:avLst>
           </a:prstGeom>
           <a:solidFill>
-            <a:srgbClr val="F2F5F9"/>
+            <a:srgbClr val="FFF2CC"/>
           </a:solidFill>
           <a:ln/>
         </p:spPr>
       </p:sp>
       <p:sp>
         <p:nvSpPr>
-          <p:cNvPr id="12" name="Text 10"/>
-          <p:cNvSpPr/>
-          <p:nvPr/>
-        </p:nvSpPr>
-        <p:spPr>
-          <a:xfrm>
-            <a:off x="822960" y="4818888"/>
-            <a:ext cx="10545775" cy="1271016"/>
+          <p:cNvPr id="16" name="Text 14"/>
+          <p:cNvSpPr/>
+          <p:nvPr/>
+        </p:nvSpPr>
+        <p:spPr>
+          <a:xfrm>
+            <a:off x="9814255" y="4837176"/>
+            <a:ext cx="1645920" cy="292608"/>
           </a:xfrm>
           <a:prstGeom prst="rect">
             <a:avLst/>
@@ -5643,71 +5422,57 @@
           <a:bodyPr wrap="square" rtlCol="0" anchor="ctr"/>
           <a:lstStyle/>
           <a:p>
-            <a:pPr indent="0" marL="0">
-              <a:buNone/>
-            </a:pPr>
-            <a:r>
-              <a:rPr lang="en-US" sz="1400" b="1" dirty="0">
-                <a:solidFill>
-                  <a:srgbClr val="1B2A4A"/>
+            <a:pPr algn="ctr" indent="0" marL="0">
+              <a:buNone/>
+            </a:pPr>
+            <a:r>
+              <a:rPr lang="en-US" sz="950" b="1" dirty="0">
+                <a:solidFill>
+                  <a:srgbClr val="8A6D1E"/>
                 </a:solidFill>
                 <a:latin typeface="Calibri" pitchFamily="34" charset="0"/>
                 <a:ea typeface="Calibri" pitchFamily="34" charset="-122"/>
                 <a:cs typeface="Calibri" pitchFamily="34" charset="-120"/>
               </a:rPr>
-              <a:t>The loop: </a:t>
-            </a:r>
-            <a:pPr indent="0" marL="0">
-              <a:buNone/>
-            </a:pPr>
-            <a:r>
-              <a:rPr lang="en-US" sz="1400" dirty="0">
-                <a:solidFill>
-                  <a:srgbClr val="1B2A4A"/>
+              <a:t>NEWER IN TOOLKIT</a:t>
+            </a:r>
+            <a:endParaRPr lang="en-US" sz="950" dirty="0"/>
+          </a:p>
+        </p:txBody>
+      </p:sp>
+      <p:sp>
+        <p:nvSpPr>
+          <p:cNvPr id="17" name="Text 15"/>
+          <p:cNvSpPr/>
+          <p:nvPr/>
+        </p:nvSpPr>
+        <p:spPr>
+          <a:xfrm>
+            <a:off x="548640" y="6473952"/>
+            <a:ext cx="5486400" cy="274320"/>
+          </a:xfrm>
+          <a:prstGeom prst="rect">
+            <a:avLst/>
+          </a:prstGeom>
+          <a:noFill/>
+          <a:ln/>
+        </p:spPr>
+        <p:txBody>
+          <a:bodyPr wrap="square" rtlCol="0" anchor="ctr"/>
+          <a:lstStyle/>
+          <a:p>
+            <a:pPr algn="l" indent="0" marL="0">
+              <a:buNone/>
+            </a:pPr>
+            <a:r>
+              <a:rPr lang="en-US" sz="1000" dirty="0">
+                <a:solidFill>
+                  <a:srgbClr val="5A6B85"/>
                 </a:solidFill>
                 <a:latin typeface="Calibri" pitchFamily="34" charset="0"/>
                 <a:ea typeface="Calibri" pitchFamily="34" charset="-122"/>
                 <a:cs typeface="Calibri" pitchFamily="34" charset="-120"/>
               </a:rPr>
-              <a:t>Reports "Converged" (clean) or appends missed work as new tasks. Run implement again and repeat until clean.</a:t>
-            </a:r>
-            <a:endParaRPr lang="en-US" sz="1400" dirty="0"/>
-          </a:p>
-        </p:txBody>
-      </p:sp>
-      <p:sp>
-        <p:nvSpPr>
-          <p:cNvPr id="13" name="Text 11"/>
-          <p:cNvSpPr/>
-          <p:nvPr/>
-        </p:nvSpPr>
-        <p:spPr>
-          <a:xfrm>
-            <a:off x="548640" y="6473952"/>
-            <a:ext cx="5486400" cy="274320"/>
-          </a:xfrm>
-          <a:prstGeom prst="rect">
-            <a:avLst/>
-          </a:prstGeom>
-          <a:noFill/>
-          <a:ln/>
-        </p:spPr>
-        <p:txBody>
-          <a:bodyPr wrap="square" rtlCol="0" anchor="ctr"/>
-          <a:lstStyle/>
-          <a:p>
-            <a:pPr algn="l" indent="0" marL="0">
-              <a:buNone/>
-            </a:pPr>
-            <a:r>
-              <a:rPr lang="en-US" sz="1000" dirty="0">
-                <a:solidFill>
-                  <a:srgbClr val="5A6B85"/>
-                </a:solidFill>
-                <a:latin typeface="Calibri" pitchFamily="34" charset="0"/>
-                <a:ea typeface="Calibri" pitchFamily="34" charset="-122"/>
-                <a:cs typeface="Calibri" pitchFamily="34" charset="-120"/>
-              </a:rPr>
               <a:t>Module 6</a:t>
             </a:r>
             <a:endParaRPr lang="en-US" sz="1000" dirty="0"/>
@@ -5716,7 +5481,7 @@
       </p:sp>
       <p:sp>
         <p:nvSpPr>
-          <p:cNvPr id="14" name="Text 12"/>
+          <p:cNvPr id="18" name="Text 16"/>
           <p:cNvSpPr/>
           <p:nvPr/>
         </p:nvSpPr>

--- a/presentation/Module-6_Reviewing-Validating-and-Maintaining-Agent-Output.pptx
+++ b/presentation/Module-6_Reviewing-Validating-and-Maintaining-Agent-Output.pptx
@@ -1456,6 +1456,54 @@
           <a:chExt cx="0" cy="0"/>
         </a:xfrm>
       </p:grpSpPr>
+      <p:sp>
+        <p:nvSpPr>
+          <p:cNvPr id="25" name="Slide Number Placeholder 0"/>
+          <p:cNvSpPr>
+            <a:spLocks noGrp="1"/>
+          </p:cNvSpPr>
+          <p:nvPr>
+            <p:ph type="sldNum" sz="quarter" idx="4294967295"/>
+          </p:nvPr>
+        </p:nvSpPr>
+        <p:spPr>
+          <a:xfrm>
+            <a:off x="5821528" y="6473952"/>
+            <a:ext cx="548640" cy="274320"/>
+          </a:xfrm>
+          <a:prstGeom prst="rect">
+            <a:avLst/>
+          </a:prstGeom>
+          <a:extLst>
+            <a:ext uri="{C572A759-6A51-4108-AA02-DFA0A04FC94B}">
+              <ma14:wrappingTextBoxFlag xmlns:ma14="http://schemas.microsoft.com/office/mac/drawingml/2011/main" val="0"/>
+            </a:ext>
+          </a:extLst>
+        </p:spPr>
+        <p:txBody>
+          <a:bodyPr anchor="ctr"/>
+          <a:lstStyle>
+            <a:lvl1pPr>
+              <a:defRPr sz="1000">
+                <a:solidFill>
+                  <a:srgbClr val="8CA3C7"/>
+                </a:solidFill>
+                <a:latin typeface="Calibri"/>
+                <a:ea typeface="Calibri"/>
+                <a:cs typeface="Calibri"/>
+              </a:defRPr>
+            </a:lvl1pPr>
+          </a:lstStyle>
+          <a:p>
+            <a:pPr algn="ctr"/>
+            <a:fld id="{F7021451-1387-4CA6-816F-3879F97B5CBC}" type="slidenum">
+              <a:rPr b="0" lang="en-US"/>
+              <a:t>1000</a:t>
+            </a:fld>
+            <a:endParaRPr lang="en-US"/>
+          </a:p>
+        </p:txBody>
+      </p:sp>
     </p:spTree>
   </p:cSld>
   <p:clrMapOvr>
@@ -1481,6 +1529,54 @@
           <a:chExt cx="0" cy="0"/>
         </a:xfrm>
       </p:grpSpPr>
+      <p:sp>
+        <p:nvSpPr>
+          <p:cNvPr id="25" name="Slide Number Placeholder 0"/>
+          <p:cNvSpPr>
+            <a:spLocks noGrp="1"/>
+          </p:cNvSpPr>
+          <p:nvPr>
+            <p:ph type="sldNum" sz="quarter" idx="4294967295"/>
+          </p:nvPr>
+        </p:nvSpPr>
+        <p:spPr>
+          <a:xfrm>
+            <a:off x="5821528" y="6473952"/>
+            <a:ext cx="548640" cy="274320"/>
+          </a:xfrm>
+          <a:prstGeom prst="rect">
+            <a:avLst/>
+          </a:prstGeom>
+          <a:extLst>
+            <a:ext uri="{C572A759-6A51-4108-AA02-DFA0A04FC94B}">
+              <ma14:wrappingTextBoxFlag xmlns:ma14="http://schemas.microsoft.com/office/mac/drawingml/2011/main" val="0"/>
+            </a:ext>
+          </a:extLst>
+        </p:spPr>
+        <p:txBody>
+          <a:bodyPr anchor="ctr"/>
+          <a:lstStyle>
+            <a:lvl1pPr>
+              <a:defRPr sz="1000">
+                <a:solidFill>
+                  <a:srgbClr val="8CA3C7"/>
+                </a:solidFill>
+                <a:latin typeface="Calibri"/>
+                <a:ea typeface="Calibri"/>
+                <a:cs typeface="Calibri"/>
+              </a:defRPr>
+            </a:lvl1pPr>
+          </a:lstStyle>
+          <a:p>
+            <a:pPr algn="ctr"/>
+            <a:fld id="{F7021451-1387-4CA6-816F-3879F97B5CBC}" type="slidenum">
+              <a:rPr b="0" lang="en-US"/>
+              <a:t>null</a:t>
+            </a:fld>
+            <a:endParaRPr lang="en-US"/>
+          </a:p>
+        </p:txBody>
+      </p:sp>
     </p:spTree>
   </p:cSld>
   <p:clrMap bg1="lt1" tx1="dk1" bg2="lt2" tx2="dk2" accent1="accent1" accent2="accent2" accent3="accent3" accent4="accent4" accent5="accent5" accent6="accent6" hlink="hlink" folHlink="folHlink"/>
@@ -1983,6 +2079,54 @@
               <a:t>Automated gates catch what they're built to catch, not everything.</a:t>
             </a:r>
             <a:endParaRPr lang="en-US" sz="1800" dirty="0"/>
+          </a:p>
+        </p:txBody>
+      </p:sp>
+      <p:sp>
+        <p:nvSpPr>
+          <p:cNvPr id="25" name="Slide Number Placeholder 0"/>
+          <p:cNvSpPr>
+            <a:spLocks noGrp="1"/>
+          </p:cNvSpPr>
+          <p:nvPr>
+            <p:ph type="sldNum" sz="quarter" idx="4294967295"/>
+          </p:nvPr>
+        </p:nvSpPr>
+        <p:spPr>
+          <a:xfrm>
+            <a:off x="5821528" y="6473952"/>
+            <a:ext cx="548640" cy="274320"/>
+          </a:xfrm>
+          <a:prstGeom prst="rect">
+            <a:avLst/>
+          </a:prstGeom>
+          <a:extLst>
+            <a:ext uri="{C572A759-6A51-4108-AA02-DFA0A04FC94B}">
+              <ma14:wrappingTextBoxFlag xmlns:ma14="http://schemas.microsoft.com/office/mac/drawingml/2011/main" val="0"/>
+            </a:ext>
+          </a:extLst>
+        </p:spPr>
+        <p:txBody>
+          <a:bodyPr anchor="ctr"/>
+          <a:lstStyle>
+            <a:lvl1pPr>
+              <a:defRPr sz="1000">
+                <a:solidFill>
+                  <a:srgbClr val="8CA3C7"/>
+                </a:solidFill>
+                <a:latin typeface="Calibri"/>
+                <a:ea typeface="Calibri"/>
+                <a:cs typeface="Calibri"/>
+              </a:defRPr>
+            </a:lvl1pPr>
+          </a:lstStyle>
+          <a:p>
+            <a:pPr algn="ctr"/>
+            <a:fld id="{F7021451-1387-4CA6-816F-3879F97B5CBC}" type="slidenum">
+              <a:rPr b="0" lang="en-US"/>
+              <a:t>1</a:t>
+            </a:fld>
+            <a:endParaRPr lang="en-US"/>
           </a:p>
         </p:txBody>
       </p:sp>
@@ -2961,6 +3105,54 @@
           </a:p>
         </p:txBody>
       </p:sp>
+      <p:sp>
+        <p:nvSpPr>
+          <p:cNvPr id="25" name="Slide Number Placeholder 0"/>
+          <p:cNvSpPr>
+            <a:spLocks noGrp="1"/>
+          </p:cNvSpPr>
+          <p:nvPr>
+            <p:ph type="sldNum" sz="quarter" idx="4294967295"/>
+          </p:nvPr>
+        </p:nvSpPr>
+        <p:spPr>
+          <a:xfrm>
+            <a:off x="5821528" y="6473952"/>
+            <a:ext cx="548640" cy="274320"/>
+          </a:xfrm>
+          <a:prstGeom prst="rect">
+            <a:avLst/>
+          </a:prstGeom>
+          <a:extLst>
+            <a:ext uri="{C572A759-6A51-4108-AA02-DFA0A04FC94B}">
+              <ma14:wrappingTextBoxFlag xmlns:ma14="http://schemas.microsoft.com/office/mac/drawingml/2011/main" val="0"/>
+            </a:ext>
+          </a:extLst>
+        </p:spPr>
+        <p:txBody>
+          <a:bodyPr anchor="ctr"/>
+          <a:lstStyle>
+            <a:lvl1pPr>
+              <a:defRPr sz="1000">
+                <a:solidFill>
+                  <a:srgbClr val="5A6B85"/>
+                </a:solidFill>
+                <a:latin typeface="Calibri"/>
+                <a:ea typeface="Calibri"/>
+                <a:cs typeface="Calibri"/>
+              </a:defRPr>
+            </a:lvl1pPr>
+          </a:lstStyle>
+          <a:p>
+            <a:pPr algn="ctr"/>
+            <a:fld id="{F7021451-1387-4CA6-816F-3879F97B5CBC}" type="slidenum">
+              <a:rPr b="0" lang="en-US"/>
+              <a:t>10</a:t>
+            </a:fld>
+            <a:endParaRPr lang="en-US"/>
+          </a:p>
+        </p:txBody>
+      </p:sp>
     </p:spTree>
   </p:cSld>
   <p:clrMapOvr>
@@ -3287,6 +3479,54 @@
           </a:p>
         </p:txBody>
       </p:sp>
+      <p:sp>
+        <p:nvSpPr>
+          <p:cNvPr id="25" name="Slide Number Placeholder 0"/>
+          <p:cNvSpPr>
+            <a:spLocks noGrp="1"/>
+          </p:cNvSpPr>
+          <p:nvPr>
+            <p:ph type="sldNum" sz="quarter" idx="4294967295"/>
+          </p:nvPr>
+        </p:nvSpPr>
+        <p:spPr>
+          <a:xfrm>
+            <a:off x="5821528" y="6473952"/>
+            <a:ext cx="548640" cy="274320"/>
+          </a:xfrm>
+          <a:prstGeom prst="rect">
+            <a:avLst/>
+          </a:prstGeom>
+          <a:extLst>
+            <a:ext uri="{C572A759-6A51-4108-AA02-DFA0A04FC94B}">
+              <ma14:wrappingTextBoxFlag xmlns:ma14="http://schemas.microsoft.com/office/mac/drawingml/2011/main" val="0"/>
+            </a:ext>
+          </a:extLst>
+        </p:spPr>
+        <p:txBody>
+          <a:bodyPr anchor="ctr"/>
+          <a:lstStyle>
+            <a:lvl1pPr>
+              <a:defRPr sz="1000">
+                <a:solidFill>
+                  <a:srgbClr val="8CA3C7"/>
+                </a:solidFill>
+                <a:latin typeface="Calibri"/>
+                <a:ea typeface="Calibri"/>
+                <a:cs typeface="Calibri"/>
+              </a:defRPr>
+            </a:lvl1pPr>
+          </a:lstStyle>
+          <a:p>
+            <a:pPr algn="ctr"/>
+            <a:fld id="{F7021451-1387-4CA6-816F-3879F97B5CBC}" type="slidenum">
+              <a:rPr b="0" lang="en-US"/>
+              <a:t>11</a:t>
+            </a:fld>
+            <a:endParaRPr lang="en-US"/>
+          </a:p>
+        </p:txBody>
+      </p:sp>
     </p:spTree>
   </p:cSld>
   <p:clrMapOvr>
@@ -3730,6 +3970,54 @@
           </a:p>
         </p:txBody>
       </p:sp>
+      <p:sp>
+        <p:nvSpPr>
+          <p:cNvPr id="25" name="Slide Number Placeholder 0"/>
+          <p:cNvSpPr>
+            <a:spLocks noGrp="1"/>
+          </p:cNvSpPr>
+          <p:nvPr>
+            <p:ph type="sldNum" sz="quarter" idx="4294967295"/>
+          </p:nvPr>
+        </p:nvSpPr>
+        <p:spPr>
+          <a:xfrm>
+            <a:off x="5821528" y="6473952"/>
+            <a:ext cx="548640" cy="274320"/>
+          </a:xfrm>
+          <a:prstGeom prst="rect">
+            <a:avLst/>
+          </a:prstGeom>
+          <a:extLst>
+            <a:ext uri="{C572A759-6A51-4108-AA02-DFA0A04FC94B}">
+              <ma14:wrappingTextBoxFlag xmlns:ma14="http://schemas.microsoft.com/office/mac/drawingml/2011/main" val="0"/>
+            </a:ext>
+          </a:extLst>
+        </p:spPr>
+        <p:txBody>
+          <a:bodyPr anchor="ctr"/>
+          <a:lstStyle>
+            <a:lvl1pPr>
+              <a:defRPr sz="1000">
+                <a:solidFill>
+                  <a:srgbClr val="5A6B85"/>
+                </a:solidFill>
+                <a:latin typeface="Calibri"/>
+                <a:ea typeface="Calibri"/>
+                <a:cs typeface="Calibri"/>
+              </a:defRPr>
+            </a:lvl1pPr>
+          </a:lstStyle>
+          <a:p>
+            <a:pPr algn="ctr"/>
+            <a:fld id="{F7021451-1387-4CA6-816F-3879F97B5CBC}" type="slidenum">
+              <a:rPr b="0" lang="en-US"/>
+              <a:t>2</a:t>
+            </a:fld>
+            <a:endParaRPr lang="en-US"/>
+          </a:p>
+        </p:txBody>
+      </p:sp>
     </p:spTree>
   </p:cSld>
   <p:clrMapOvr>
@@ -4080,6 +4368,54 @@
           </a:p>
         </p:txBody>
       </p:sp>
+      <p:sp>
+        <p:nvSpPr>
+          <p:cNvPr id="25" name="Slide Number Placeholder 0"/>
+          <p:cNvSpPr>
+            <a:spLocks noGrp="1"/>
+          </p:cNvSpPr>
+          <p:nvPr>
+            <p:ph type="sldNum" sz="quarter" idx="4294967295"/>
+          </p:nvPr>
+        </p:nvSpPr>
+        <p:spPr>
+          <a:xfrm>
+            <a:off x="5821528" y="6473952"/>
+            <a:ext cx="548640" cy="274320"/>
+          </a:xfrm>
+          <a:prstGeom prst="rect">
+            <a:avLst/>
+          </a:prstGeom>
+          <a:extLst>
+            <a:ext uri="{C572A759-6A51-4108-AA02-DFA0A04FC94B}">
+              <ma14:wrappingTextBoxFlag xmlns:ma14="http://schemas.microsoft.com/office/mac/drawingml/2011/main" val="0"/>
+            </a:ext>
+          </a:extLst>
+        </p:spPr>
+        <p:txBody>
+          <a:bodyPr anchor="ctr"/>
+          <a:lstStyle>
+            <a:lvl1pPr>
+              <a:defRPr sz="1000">
+                <a:solidFill>
+                  <a:srgbClr val="5A6B85"/>
+                </a:solidFill>
+                <a:latin typeface="Calibri"/>
+                <a:ea typeface="Calibri"/>
+                <a:cs typeface="Calibri"/>
+              </a:defRPr>
+            </a:lvl1pPr>
+          </a:lstStyle>
+          <a:p>
+            <a:pPr algn="ctr"/>
+            <a:fld id="{F7021451-1387-4CA6-816F-3879F97B5CBC}" type="slidenum">
+              <a:rPr b="0" lang="en-US"/>
+              <a:t>3</a:t>
+            </a:fld>
+            <a:endParaRPr lang="en-US"/>
+          </a:p>
+        </p:txBody>
+      </p:sp>
     </p:spTree>
   </p:cSld>
   <p:clrMapOvr>
@@ -4430,6 +4766,54 @@
           </a:p>
         </p:txBody>
       </p:sp>
+      <p:sp>
+        <p:nvSpPr>
+          <p:cNvPr id="25" name="Slide Number Placeholder 0"/>
+          <p:cNvSpPr>
+            <a:spLocks noGrp="1"/>
+          </p:cNvSpPr>
+          <p:nvPr>
+            <p:ph type="sldNum" sz="quarter" idx="4294967295"/>
+          </p:nvPr>
+        </p:nvSpPr>
+        <p:spPr>
+          <a:xfrm>
+            <a:off x="5821528" y="6473952"/>
+            <a:ext cx="548640" cy="274320"/>
+          </a:xfrm>
+          <a:prstGeom prst="rect">
+            <a:avLst/>
+          </a:prstGeom>
+          <a:extLst>
+            <a:ext uri="{C572A759-6A51-4108-AA02-DFA0A04FC94B}">
+              <ma14:wrappingTextBoxFlag xmlns:ma14="http://schemas.microsoft.com/office/mac/drawingml/2011/main" val="0"/>
+            </a:ext>
+          </a:extLst>
+        </p:spPr>
+        <p:txBody>
+          <a:bodyPr anchor="ctr"/>
+          <a:lstStyle>
+            <a:lvl1pPr>
+              <a:defRPr sz="1000">
+                <a:solidFill>
+                  <a:srgbClr val="5A6B85"/>
+                </a:solidFill>
+                <a:latin typeface="Calibri"/>
+                <a:ea typeface="Calibri"/>
+                <a:cs typeface="Calibri"/>
+              </a:defRPr>
+            </a:lvl1pPr>
+          </a:lstStyle>
+          <a:p>
+            <a:pPr algn="ctr"/>
+            <a:fld id="{F7021451-1387-4CA6-816F-3879F97B5CBC}" type="slidenum">
+              <a:rPr b="0" lang="en-US"/>
+              <a:t>4</a:t>
+            </a:fld>
+            <a:endParaRPr lang="en-US"/>
+          </a:p>
+        </p:txBody>
+      </p:sp>
     </p:spTree>
   </p:cSld>
   <p:clrMapOvr>
@@ -4740,6 +5124,54 @@
           </a:p>
         </p:txBody>
       </p:sp>
+      <p:sp>
+        <p:nvSpPr>
+          <p:cNvPr id="25" name="Slide Number Placeholder 0"/>
+          <p:cNvSpPr>
+            <a:spLocks noGrp="1"/>
+          </p:cNvSpPr>
+          <p:nvPr>
+            <p:ph type="sldNum" sz="quarter" idx="4294967295"/>
+          </p:nvPr>
+        </p:nvSpPr>
+        <p:spPr>
+          <a:xfrm>
+            <a:off x="5821528" y="6473952"/>
+            <a:ext cx="548640" cy="274320"/>
+          </a:xfrm>
+          <a:prstGeom prst="rect">
+            <a:avLst/>
+          </a:prstGeom>
+          <a:extLst>
+            <a:ext uri="{C572A759-6A51-4108-AA02-DFA0A04FC94B}">
+              <ma14:wrappingTextBoxFlag xmlns:ma14="http://schemas.microsoft.com/office/mac/drawingml/2011/main" val="0"/>
+            </a:ext>
+          </a:extLst>
+        </p:spPr>
+        <p:txBody>
+          <a:bodyPr anchor="ctr"/>
+          <a:lstStyle>
+            <a:lvl1pPr>
+              <a:defRPr sz="1000">
+                <a:solidFill>
+                  <a:srgbClr val="8CA3C7"/>
+                </a:solidFill>
+                <a:latin typeface="Calibri"/>
+                <a:ea typeface="Calibri"/>
+                <a:cs typeface="Calibri"/>
+              </a:defRPr>
+            </a:lvl1pPr>
+          </a:lstStyle>
+          <a:p>
+            <a:pPr algn="ctr"/>
+            <a:fld id="{F7021451-1387-4CA6-816F-3879F97B5CBC}" type="slidenum">
+              <a:rPr b="0" lang="en-US"/>
+              <a:t>5</a:t>
+            </a:fld>
+            <a:endParaRPr lang="en-US"/>
+          </a:p>
+        </p:txBody>
+      </p:sp>
     </p:spTree>
   </p:cSld>
   <p:clrMapOvr>
@@ -4805,7 +5237,7 @@
                 <a:ea typeface="Calibri" pitchFamily="34" charset="-122"/>
                 <a:cs typeface="Calibri" pitchFamily="34" charset="-120"/>
               </a:rPr>
-              <a:t>APPLYING THIS WITH</a:t>
+              <a:t>APPLYING THE CONCEPTS</a:t>
             </a:r>
             <a:endParaRPr lang="en-US" sz="1400" dirty="0"/>
           </a:p>
@@ -4925,6 +5357,54 @@
               <a:t>Spec-Driven Development with Agentic AI</a:t>
             </a:r>
             <a:endParaRPr lang="en-US" sz="1000" dirty="0"/>
+          </a:p>
+        </p:txBody>
+      </p:sp>
+      <p:sp>
+        <p:nvSpPr>
+          <p:cNvPr id="25" name="Slide Number Placeholder 0"/>
+          <p:cNvSpPr>
+            <a:spLocks noGrp="1"/>
+          </p:cNvSpPr>
+          <p:nvPr>
+            <p:ph type="sldNum" sz="quarter" idx="4294967295"/>
+          </p:nvPr>
+        </p:nvSpPr>
+        <p:spPr>
+          <a:xfrm>
+            <a:off x="5821528" y="6473952"/>
+            <a:ext cx="548640" cy="274320"/>
+          </a:xfrm>
+          <a:prstGeom prst="rect">
+            <a:avLst/>
+          </a:prstGeom>
+          <a:extLst>
+            <a:ext uri="{C572A759-6A51-4108-AA02-DFA0A04FC94B}">
+              <ma14:wrappingTextBoxFlag xmlns:ma14="http://schemas.microsoft.com/office/mac/drawingml/2011/main" val="0"/>
+            </a:ext>
+          </a:extLst>
+        </p:spPr>
+        <p:txBody>
+          <a:bodyPr anchor="ctr"/>
+          <a:lstStyle>
+            <a:lvl1pPr>
+              <a:defRPr sz="1000">
+                <a:solidFill>
+                  <a:srgbClr val="8CA3C7"/>
+                </a:solidFill>
+                <a:latin typeface="Calibri"/>
+                <a:ea typeface="Calibri"/>
+                <a:cs typeface="Calibri"/>
+              </a:defRPr>
+            </a:lvl1pPr>
+          </a:lstStyle>
+          <a:p>
+            <a:pPr algn="ctr"/>
+            <a:fld id="{F7021451-1387-4CA6-816F-3879F97B5CBC}" type="slidenum">
+              <a:rPr b="0" lang="en-US"/>
+              <a:t>6</a:t>
+            </a:fld>
+            <a:endParaRPr lang="en-US"/>
           </a:p>
         </p:txBody>
       </p:sp>
@@ -5518,6 +5998,54 @@
           </a:p>
         </p:txBody>
       </p:sp>
+      <p:sp>
+        <p:nvSpPr>
+          <p:cNvPr id="25" name="Slide Number Placeholder 0"/>
+          <p:cNvSpPr>
+            <a:spLocks noGrp="1"/>
+          </p:cNvSpPr>
+          <p:nvPr>
+            <p:ph type="sldNum" sz="quarter" idx="4294967295"/>
+          </p:nvPr>
+        </p:nvSpPr>
+        <p:spPr>
+          <a:xfrm>
+            <a:off x="5821528" y="6473952"/>
+            <a:ext cx="548640" cy="274320"/>
+          </a:xfrm>
+          <a:prstGeom prst="rect">
+            <a:avLst/>
+          </a:prstGeom>
+          <a:extLst>
+            <a:ext uri="{C572A759-6A51-4108-AA02-DFA0A04FC94B}">
+              <ma14:wrappingTextBoxFlag xmlns:ma14="http://schemas.microsoft.com/office/mac/drawingml/2011/main" val="0"/>
+            </a:ext>
+          </a:extLst>
+        </p:spPr>
+        <p:txBody>
+          <a:bodyPr anchor="ctr"/>
+          <a:lstStyle>
+            <a:lvl1pPr>
+              <a:defRPr sz="1000">
+                <a:solidFill>
+                  <a:srgbClr val="5A6B85"/>
+                </a:solidFill>
+                <a:latin typeface="Calibri"/>
+                <a:ea typeface="Calibri"/>
+                <a:cs typeface="Calibri"/>
+              </a:defRPr>
+            </a:lvl1pPr>
+          </a:lstStyle>
+          <a:p>
+            <a:pPr algn="ctr"/>
+            <a:fld id="{F7021451-1387-4CA6-816F-3879F97B5CBC}" type="slidenum">
+              <a:rPr b="0" lang="en-US"/>
+              <a:t>7</a:t>
+            </a:fld>
+            <a:endParaRPr lang="en-US"/>
+          </a:p>
+        </p:txBody>
+      </p:sp>
     </p:spTree>
   </p:cSld>
   <p:clrMapOvr>
@@ -5583,7 +6111,7 @@
                 <a:ea typeface="Calibri" pitchFamily="34" charset="-122"/>
                 <a:cs typeface="Calibri" pitchFamily="34" charset="-120"/>
               </a:rPr>
-              <a:t>APPLYING THIS WITH</a:t>
+              <a:t>APPLYING THE CONCEPTS</a:t>
             </a:r>
             <a:endParaRPr lang="en-US" sz="1400" dirty="0"/>
           </a:p>
@@ -5703,6 +6231,54 @@
               <a:t>Spec-Driven Development with Agentic AI</a:t>
             </a:r>
             <a:endParaRPr lang="en-US" sz="1000" dirty="0"/>
+          </a:p>
+        </p:txBody>
+      </p:sp>
+      <p:sp>
+        <p:nvSpPr>
+          <p:cNvPr id="25" name="Slide Number Placeholder 0"/>
+          <p:cNvSpPr>
+            <a:spLocks noGrp="1"/>
+          </p:cNvSpPr>
+          <p:nvPr>
+            <p:ph type="sldNum" sz="quarter" idx="4294967295"/>
+          </p:nvPr>
+        </p:nvSpPr>
+        <p:spPr>
+          <a:xfrm>
+            <a:off x="5821528" y="6473952"/>
+            <a:ext cx="548640" cy="274320"/>
+          </a:xfrm>
+          <a:prstGeom prst="rect">
+            <a:avLst/>
+          </a:prstGeom>
+          <a:extLst>
+            <a:ext uri="{C572A759-6A51-4108-AA02-DFA0A04FC94B}">
+              <ma14:wrappingTextBoxFlag xmlns:ma14="http://schemas.microsoft.com/office/mac/drawingml/2011/main" val="0"/>
+            </a:ext>
+          </a:extLst>
+        </p:spPr>
+        <p:txBody>
+          <a:bodyPr anchor="ctr"/>
+          <a:lstStyle>
+            <a:lvl1pPr>
+              <a:defRPr sz="1000">
+                <a:solidFill>
+                  <a:srgbClr val="8CA3C7"/>
+                </a:solidFill>
+                <a:latin typeface="Calibri"/>
+                <a:ea typeface="Calibri"/>
+                <a:cs typeface="Calibri"/>
+              </a:defRPr>
+            </a:lvl1pPr>
+          </a:lstStyle>
+          <a:p>
+            <a:pPr algn="ctr"/>
+            <a:fld id="{F7021451-1387-4CA6-816F-3879F97B5CBC}" type="slidenum">
+              <a:rPr b="0" lang="en-US"/>
+              <a:t>8</a:t>
+            </a:fld>
+            <a:endParaRPr lang="en-US"/>
           </a:p>
         </p:txBody>
       </p:sp>
@@ -6157,6 +6733,54 @@
               <a:t>Spec-Driven Development with Agentic AI</a:t>
             </a:r>
             <a:endParaRPr lang="en-US" sz="1000" dirty="0"/>
+          </a:p>
+        </p:txBody>
+      </p:sp>
+      <p:sp>
+        <p:nvSpPr>
+          <p:cNvPr id="25" name="Slide Number Placeholder 0"/>
+          <p:cNvSpPr>
+            <a:spLocks noGrp="1"/>
+          </p:cNvSpPr>
+          <p:nvPr>
+            <p:ph type="sldNum" sz="quarter" idx="4294967295"/>
+          </p:nvPr>
+        </p:nvSpPr>
+        <p:spPr>
+          <a:xfrm>
+            <a:off x="5821528" y="6473952"/>
+            <a:ext cx="548640" cy="274320"/>
+          </a:xfrm>
+          <a:prstGeom prst="rect">
+            <a:avLst/>
+          </a:prstGeom>
+          <a:extLst>
+            <a:ext uri="{C572A759-6A51-4108-AA02-DFA0A04FC94B}">
+              <ma14:wrappingTextBoxFlag xmlns:ma14="http://schemas.microsoft.com/office/mac/drawingml/2011/main" val="0"/>
+            </a:ext>
+          </a:extLst>
+        </p:spPr>
+        <p:txBody>
+          <a:bodyPr anchor="ctr"/>
+          <a:lstStyle>
+            <a:lvl1pPr>
+              <a:defRPr sz="1000">
+                <a:solidFill>
+                  <a:srgbClr val="5A6B85"/>
+                </a:solidFill>
+                <a:latin typeface="Calibri"/>
+                <a:ea typeface="Calibri"/>
+                <a:cs typeface="Calibri"/>
+              </a:defRPr>
+            </a:lvl1pPr>
+          </a:lstStyle>
+          <a:p>
+            <a:pPr algn="ctr"/>
+            <a:fld id="{F7021451-1387-4CA6-816F-3879F97B5CBC}" type="slidenum">
+              <a:rPr b="0" lang="en-US"/>
+              <a:t>9</a:t>
+            </a:fld>
+            <a:endParaRPr lang="en-US"/>
           </a:p>
         </p:txBody>
       </p:sp>

--- a/presentation/Module-6_Reviewing-Validating-and-Maintaining-Agent-Output.pptx
+++ b/presentation/Module-6_Reviewing-Validating-and-Maintaining-Agent-Output.pptx
@@ -3277,7 +3277,7 @@
                 <a:ea typeface="Calibri" pitchFamily="34" charset="-122"/>
                 <a:cs typeface="Calibri" pitchFamily="34" charset="-120"/>
               </a:rPr>
-              <a:t>Passing every gate is not the same as being correct.</a:t>
+              <a:t>Passing every gate is not the same as being correct, which is why human review still has a job to do afterward.</a:t>
             </a:r>
             <a:endParaRPr lang="en-US" sz="1700" dirty="0"/>
           </a:p>
@@ -3336,7 +3336,7 @@
                 <a:ea typeface="Calibri" pitchFamily="34" charset="-122"/>
                 <a:cs typeface="Calibri" pitchFamily="34" charset="-120"/>
               </a:rPr>
-              <a:t>Both frameworks exist to answer the same question after code lands: does it still match what was decided?</a:t>
+              <a:t>Both frameworks exist to answer the same question after code lands: does it still match what was decided, and if not, why not?</a:t>
             </a:r>
             <a:endParaRPr lang="en-US" sz="1700" dirty="0"/>
           </a:p>
@@ -3395,7 +3395,7 @@
                 <a:ea typeface="Calibri" pitchFamily="34" charset="-122"/>
                 <a:cs typeface="Calibri" pitchFamily="34" charset="-120"/>
               </a:rPr>
-              <a:t>Keeping documentation current is what makes it worth trusting.</a:t>
+              <a:t>Keeping documentation current is what makes it worth trusting the next time someone, or some agent, reads it.</a:t>
             </a:r>
             <a:endParaRPr lang="en-US" sz="1700" dirty="0"/>
           </a:p>
@@ -4203,7 +4203,7 @@
                 <a:ea typeface="Calibri" pitchFamily="34" charset="-122"/>
                 <a:cs typeface="Calibri" pitchFamily="34" charset="-120"/>
               </a:rPr>
-              <a:t>Confident-looking output can still contain hallucinations, unsafe changes, or assumptions that were never actually verified.</a:t>
+              <a:t>Confident-looking output can still contain hallucinations, unsafe changes, or assumptions that were never actually verified, because a gate only checks what it was built to check, not everything that could go wrong.</a:t>
             </a:r>
             <a:endParaRPr lang="en-US" sz="1500" dirty="0"/>
           </a:p>
@@ -4284,7 +4284,7 @@
                 <a:ea typeface="Calibri" pitchFamily="34" charset="-122"/>
                 <a:cs typeface="Calibri" pitchFamily="34" charset="-120"/>
               </a:rPr>
-              <a:t>Production systems warrant extra scrutiny beyond what any automated gate applies by default.</a:t>
+              <a:t>Production systems warrant extra scrutiny beyond what any automated gate applies by default, since the cost of a mistake reaching production is far higher than the cost of one more careful read.</a:t>
             </a:r>
             <a:endParaRPr lang="en-US" sz="1500" dirty="0"/>
           </a:p>
@@ -4601,7 +4601,7 @@
                 <a:ea typeface="Calibri" pitchFamily="34" charset="-122"/>
                 <a:cs typeface="Calibri" pitchFamily="34" charset="-120"/>
               </a:rPr>
-              <a:t>A spec, constitution, or instruction file that no longer matches the code stops being trustworthy documentation.</a:t>
+              <a:t>A spec, constitution, or instruction file that no longer matches the code stops being trustworthy documentation, and worse, it can actively mislead the next person, or agent, who reads it.</a:t>
             </a:r>
             <a:endParaRPr lang="en-US" sz="1500" dirty="0"/>
           </a:p>
@@ -4682,7 +4682,7 @@
                 <a:ea typeface="Calibri" pitchFamily="34" charset="-122"/>
                 <a:cs typeface="Calibri" pitchFamily="34" charset="-120"/>
               </a:rPr>
-              <a:t>Keeping them in sync is what makes them a usable audit trail later, not just a snapshot of intent at one point in time.</a:t>
+              <a:t>Keeping them in sync is what makes them a usable audit trail later, not just a snapshot of intent at one point in time that nobody bothered to update.</a:t>
             </a:r>
             <a:endParaRPr lang="en-US" sz="1500" dirty="0"/>
           </a:p>
@@ -4979,7 +4979,7 @@
                 <a:ea typeface="Calibri" pitchFamily="34" charset="-122"/>
                 <a:cs typeface="Calibri" pitchFamily="34" charset="-120"/>
               </a:rPr>
-              <a:t>Confident output and correct output are not the same thing.</a:t>
+              <a:t>Confident output and correct output are not the same thing: an agent can produce polished, well-structured code that is still wrong in a way that's hard to spot at a glance.</a:t>
             </a:r>
             <a:endParaRPr lang="en-US" sz="1500" dirty="0"/>
           </a:p>
@@ -5040,7 +5040,7 @@
                 <a:ea typeface="Calibri" pitchFamily="34" charset="-122"/>
                 <a:cs typeface="Calibri" pitchFamily="34" charset="-120"/>
               </a:rPr>
-              <a:t>The gap between them is exactly what human review exists to catch.</a:t>
+              <a:t>The gap between them is exactly what human review exists to catch, which is why this step doesn't get skipped even after every automated gate has already passed.</a:t>
             </a:r>
             <a:endParaRPr lang="en-US" sz="1500" dirty="0"/>
           </a:p>
@@ -5656,7 +5656,7 @@
                 <a:ea typeface="Calibri" pitchFamily="34" charset="-122"/>
                 <a:cs typeface="Calibri" pitchFamily="34" charset="-120"/>
               </a:rPr>
-              <a:t>Re-run after implementation as an extra review pass, not just before, to catch drift between what was built and what was specified.</a:t>
+              <a:t>Re-run after implementation as an extra review pass, not just before, to catch drift between what was built and what was specified, in case the implementation quietly diverged from the plan along the way.</a:t>
             </a:r>
             <a:endParaRPr lang="en-US" sz="1350" dirty="0"/>
           </a:p>
@@ -5731,7 +5731,7 @@
                 <a:ea typeface="Calibri" pitchFamily="34" charset="-122"/>
                 <a:cs typeface="Calibri" pitchFamily="34" charset="-120"/>
               </a:rPr>
-              <a:t>When review surfaces a gap, update the constitution or the spec directly (via /speckit.specify or another /speckit.clarify pass) rather than letting the code silently diverge from them.</a:t>
+              <a:t>When review surfaces a gap, update the constitution or the spec directly (via /speckit.specify or another /speckit.clarify pass) rather than letting the code silently diverge from them, so the documentation stays the thing you can actually trust.</a:t>
             </a:r>
             <a:endParaRPr lang="en-US" sz="1400" dirty="0"/>
           </a:p>
@@ -5853,7 +5853,7 @@
                 <a:ea typeface="Calibri" pitchFamily="34" charset="-122"/>
                 <a:cs typeface="Calibri" pitchFamily="34" charset="-120"/>
               </a:rPr>
-              <a:t>Assesses the codebase against the feature's spec, plan, and tasks and appends any missed work as new tasks. Append-only: it never edits or deletes code directly.</a:t>
+              <a:t>Assesses the codebase against the feature's spec, plan, and tasks and appends any missed work as new tasks. Append-only: it never edits or deletes code directly, so it's a safe way to surface gaps without risking an unreviewed change.</a:t>
             </a:r>
             <a:endParaRPr lang="en-US" sz="1200" dirty="0"/>
           </a:p>
@@ -6530,7 +6530,7 @@
                 <a:ea typeface="Calibri" pitchFamily="34" charset="-122"/>
                 <a:cs typeface="Calibri" pitchFamily="34" charset="-120"/>
               </a:rPr>
-              <a:t>Validates implementation against the change's artifacts across Completeness, Correctness, and Coherence. Reports CRITICAL, WARNING, or SUGGESTION issues.</a:t>
+              <a:t>Validates implementation against the change's artifacts across Completeness, Correctness, and Coherence. Reports CRITICAL, WARNING, or SUGGESTION issues, so a team can triage by severity instead of treating every finding the same way.</a:t>
             </a:r>
             <a:endParaRPr lang="en-US" sz="1350" dirty="0"/>
           </a:p>
@@ -6652,7 +6652,7 @@
                 <a:ea typeface="Calibri" pitchFamily="34" charset="-122"/>
                 <a:cs typeface="Calibri" pitchFamily="34" charset="-120"/>
               </a:rPr>
-              <a:t>Keeps artifacts coherent when something changes: revise one and it reconciles the others, the drift problem handled directly.</a:t>
+              <a:t>Keeps artifacts coherent when something changes: revise one and it reconciles the others, the drift problem handled directly instead of relying on someone remembering to update every related file by hand.</a:t>
             </a:r>
             <a:endParaRPr lang="en-US" sz="1350" dirty="0"/>
           </a:p>
